--- a/lectures/theory/Lecture1.1_Course_Structure.pptx
+++ b/lectures/theory/Lecture1.1_Course_Structure.pptx
@@ -200,7 +200,7 @@
           <a:p>
             <a:fld id="{5282F153-3F37-0F45-9E97-73ACFA13230C}" type="datetimeFigureOut">
               <a:rPr lang="en-US"/>
-              <a:t>7/31/26</a:t>
+              <a:t>8/10/26</a:t>
             </a:fld>
             <a:endParaRPr lang="en-US"/>
           </a:p>
@@ -6077,17 +6077,6 @@
             <a:pPr marL="0" indent="0">
               <a:buNone/>
             </a:pPr>
-            <a:r>
-              <a:rPr lang="en-US" sz="1300" dirty="0">
-                <a:solidFill>
-                  <a:srgbClr val="2DD4BF"/>
-                </a:solidFill>
-                <a:latin typeface="IBM Plex Mono" pitchFamily="34" charset="0"/>
-                <a:ea typeface="IBM Plex Mono" pitchFamily="34" charset="-122"/>
-                <a:cs typeface="IBM Plex Mono" pitchFamily="34" charset="-120"/>
-              </a:rPr>
-              <a:t>20 min</a:t>
-            </a:r>
             <a:endParaRPr lang="en-US" sz="1300" dirty="0"/>
           </a:p>
         </p:txBody>
@@ -6194,17 +6183,6 @@
             <a:pPr marL="0" indent="0">
               <a:buNone/>
             </a:pPr>
-            <a:r>
-              <a:rPr lang="en-US" sz="1300" dirty="0">
-                <a:solidFill>
-                  <a:srgbClr val="2DD4BF"/>
-                </a:solidFill>
-                <a:latin typeface="IBM Plex Mono" pitchFamily="34" charset="0"/>
-                <a:ea typeface="IBM Plex Mono" pitchFamily="34" charset="-122"/>
-                <a:cs typeface="IBM Plex Mono" pitchFamily="34" charset="-120"/>
-              </a:rPr>
-              <a:t>20 min</a:t>
-            </a:r>
             <a:endParaRPr lang="en-US" sz="1300" dirty="0"/>
           </a:p>
         </p:txBody>
@@ -6311,17 +6289,6 @@
             <a:pPr marL="0" indent="0">
               <a:buNone/>
             </a:pPr>
-            <a:r>
-              <a:rPr lang="en-US" sz="1300" dirty="0">
-                <a:solidFill>
-                  <a:srgbClr val="2DD4BF"/>
-                </a:solidFill>
-                <a:latin typeface="IBM Plex Mono" pitchFamily="34" charset="0"/>
-                <a:ea typeface="IBM Plex Mono" pitchFamily="34" charset="-122"/>
-                <a:cs typeface="IBM Plex Mono" pitchFamily="34" charset="-120"/>
-              </a:rPr>
-              <a:t>rest</a:t>
-            </a:r>
             <a:endParaRPr lang="en-US" sz="1300" dirty="0"/>
           </a:p>
         </p:txBody>
@@ -6671,7 +6638,7 @@
                 <a:ea typeface="IBM Plex Sans" pitchFamily="34" charset="-122"/>
                 <a:cs typeface="IBM Plex Sans" pitchFamily="34" charset="-120"/>
               </a:rPr>
-              <a:t>Questions during the lecture, not after it</a:t>
+              <a:t>Questions during the lecture</a:t>
             </a:r>
             <a:endParaRPr lang="en-US" sz="1200" dirty="0"/>
           </a:p>

--- a/lectures/theory/Lecture1.1_Course_Structure.pptx
+++ b/lectures/theory/Lecture1.1_Course_Structure.pptx
@@ -5479,9 +5479,6 @@
           <a:bodyPr wrap="square" rtlCol="0" anchor="ctr"/>
           <a:lstStyle/>
           <a:p>
-            <a:pPr marL="0" indent="0">
-              <a:buNone/>
-            </a:pPr>
             <a:r>
               <a:rPr lang="en-US" sz="1300" dirty="0">
                 <a:solidFill>
@@ -5491,7 +5488,7 @@
                 <a:ea typeface="IBM Plex Mono" pitchFamily="34" charset="-122"/>
                 <a:cs typeface="IBM Plex Mono" pitchFamily="34" charset="-120"/>
               </a:rPr>
-              <a:t>weeks 33 · 34 · 35</a:t>
+              <a:t>weeks 33 · 34 · 35 · 36</a:t>
             </a:r>
             <a:endParaRPr lang="en-US" sz="1300" dirty="0"/>
           </a:p>
@@ -5506,7 +5503,7 @@
         <p:spPr>
           <a:xfrm>
             <a:off x="4389120" y="1920240"/>
-            <a:ext cx="6949440" cy="1920240"/>
+            <a:ext cx="5669280" cy="1920240"/>
           </a:xfrm>
           <a:prstGeom prst="roundRect">
             <a:avLst>
@@ -5644,7 +5641,7 @@
                 <a:ea typeface="IBM Plex Mono" pitchFamily="34" charset="-122"/>
                 <a:cs typeface="IBM Plex Mono" pitchFamily="34" charset="-120"/>
               </a:rPr>
-              <a:t>weeks 36 · 37 · 38 · 39 · 40 · 41</a:t>
+              <a:t>weeks 37 · 38 · 39 · 40 · 41</a:t>
             </a:r>
             <a:endParaRPr lang="en-US" sz="1300" dirty="0"/>
           </a:p>
